--- a/public/materialy/1L/6/Prezentace k hodinám/7. Infografika a prezentace.pptx
+++ b/public/materialy/1L/6/Prezentace k hodinám/7. Infografika a prezentace.pptx
@@ -513,7 +513,7 @@
           </a:p>
           <a:p>
             <a:r>
-              <a:t>Soubory: Canva, 08. Infografika v Canvě.txt, vystupy_k_posouzeni/</a:t>
+              <a:t>Soubory: Canva, 08. Infografika v Canvě.txt, Výstupy k posouzení/</a:t>
             </a:r>
           </a:p>
           <a:p>
@@ -758,7 +758,7 @@
           </a:p>
           <a:p>
             <a:r>
-              <a:t>Soubory: Canva, 08. Infografika v Canvě.txt, vystupy_k_posouzeni/</a:t>
+              <a:t>Soubory: Canva, 08. Infografika v Canvě.txt, Výstupy k posouzení/</a:t>
             </a:r>
           </a:p>
           <a:p>
@@ -4753,7 +4753,7 @@
                 </a:solidFill>
                 <a:latin typeface="Calibri"/>
               </a:rPr>
-              <a:t>Otevři obě infografiky ze složky vystupy_k_posouzeni.</a:t>
+              <a:t>Otevři obě infografiky ze složky Výstupy k posouzení.</a:t>
             </a:r>
           </a:p>
         </p:txBody>
@@ -6036,7 +6036,7 @@
                 </a:solidFill>
                 <a:latin typeface="Calibri"/>
               </a:rPr>
-              <a:t>Canva, 08. Infografika v Canvě.txt, vystupy_k_posouzeni/</a:t>
+              <a:t>Canva, 08. Infografika v Canvě.txt, Výstupy k posouzení/</a:t>
             </a:r>
           </a:p>
         </p:txBody>

--- a/public/materialy/1L/6/Prezentace k hodinám/7. Infografika a prezentace.pptx
+++ b/public/materialy/1L/6/Prezentace k hodinám/7. Infografika a prezentace.pptx
@@ -508,17 +508,61 @@
           <a:lstStyle/>
           <a:p>
             <a:r>
-              <a:t>Cíl hodiny: Student vytvoří infografiku, která data zobrazuje poctivě, a rozpozná zavádějící zobrazení.</a:t>
-            </a:r>
-          </a:p>
-          <a:p>
-            <a:r>
-              <a:t>Soubory: Canva, Infografika v Canvě.txt, Výstupy k posouzení/</a:t>
-            </a:r>
-          </a:p>
-          <a:p>
-            <a:r>
-              <a:t>Výstup: Seznam pěti chyb v ukázce B, vlastní infografika ve dvou formátech a zdůvodnění.</a:t>
+              <a:t>NEŽ ZAZVONÍ</a:t>
+            </a:r>
+          </a:p>
+          <a:p>
+            <a:r>
+              <a:t>Ověř školní přístup do Canvy a pravidla organizace pro účty nezletilých. Tohle je jediná hodina bloku, která potřebuje přihlášení k externí službě — vyřeš to dřív než v hodině.</a:t>
+            </a:r>
+          </a:p>
+          <a:p>
+            <a:r>
+              <a:t>Rozbal Výstupy k posouzení.zip a rozdej Infografika v Canvě.txt. Studenti potřebují mít infografiku A i B otevřenou vedle sebe.</a:t>
+            </a:r>
+          </a:p>
+          <a:p/>
+          <a:p>
+            <a:r>
+              <a:t>KDYŽ CANVA NENÍ</a:t>
+            </a:r>
+          </a:p>
+          <a:p>
+            <a:r>
+              <a:t>Metodika s tím počítá: infografika se navrhne na papír A4 podle stejných kritérií. Hodnotí se rozvržení a poctivost zobrazení, ne ovládání nástroje. Rozbor ukázek A a B proběhne beze změny — je to jen prohlížení obrázků.</a:t>
+            </a:r>
+          </a:p>
+          <a:p/>
+          <a:p>
+            <a:r>
+              <a:t>CÍL HODINY</a:t>
+            </a:r>
+          </a:p>
+          <a:p>
+            <a:r>
+              <a:t>Student vytvoří infografiku, která data zobrazuje poctivě, a rozpozná zavádějící zobrazení.</a:t>
+            </a:r>
+          </a:p>
+          <a:p/>
+          <a:p>
+            <a:r>
+              <a:t>VÝSTUP, KTERÝ VYBÍRÁŠ</a:t>
+            </a:r>
+          </a:p>
+          <a:p>
+            <a:r>
+              <a:t>Seznam pěti chyb v ukázce B, vlastní infografika ve dvou formátech a zdůvodnění.</a:t>
+            </a:r>
+          </a:p>
+          <a:p/>
+          <a:p>
+            <a:r>
+              <a:t>ROZVRŽENÍ</a:t>
+            </a:r>
+          </a:p>
+          <a:p>
+            <a:r>
+              <a:t>5 min porovnání · 7 min výklad · 28 min práce · 5 min rozbor a exit ticket.</a:t>
             </a:r>
           </a:p>
         </p:txBody>
@@ -591,14 +635,42 @@
               <a:t>Čas: 0–5 minut.</a:t>
             </a:r>
           </a:p>
-          <a:p>
-            <a:r>
-              <a:t>Otázka pro studenty: Dva grafy ukazují stejná čísla, ale působí opačně. Čím to je?</a:t>
-            </a:r>
-          </a:p>
-          <a:p>
-            <a:r>
-              <a:t>Postup: nech studenty rozhodnout a zapsat důvod dřív, než ukážeš řešení. Neprozrazuj správnou odpověď.</a:t>
+          <a:p/>
+          <a:p>
+            <a:r>
+              <a:t>CO ŘEKNEŠ</a:t>
+            </a:r>
+          </a:p>
+          <a:p>
+            <a:r>
+              <a:t>„Otevřete si obě infografiky ze složky Výstupy k posouzení vedle sebe. Ukazují stejná čísla. Působí opačně. Nejdřív najděte čísla, která jsou v obou stejná — a pak pojmenujte, čím to je.“</a:t>
+            </a:r>
+          </a:p>
+          <a:p/>
+          <a:p>
+            <a:r>
+              <a:t>CO DĚLÁŠ</a:t>
+            </a:r>
+          </a:p>
+          <a:p>
+            <a:r>
+              <a:t>Nech je pracovat mlčky a nekomentuj. Většina třídy nejdřív řekne „B je barevnější“. To je pozorování, ne odpověď — pošli je zpátky k číslům.</a:t>
+            </a:r>
+          </a:p>
+          <a:p>
+            <a:r>
+              <a:t>Kdo najde useknutou osu do pěti minut, dostane úkol navíc: ať najde ještě dvě další chyby, než se to začne probírat.</a:t>
+            </a:r>
+          </a:p>
+          <a:p/>
+          <a:p>
+            <a:r>
+              <a:t>POZOR</a:t>
+            </a:r>
+          </a:p>
+          <a:p>
+            <a:r>
+              <a:t>Tady se nesmí prozradit seznam chyb. Celá hodina stojí na tom, že si je studenti najdou sami.</a:t>
             </a:r>
           </a:p>
         </p:txBody>
@@ -668,22 +740,55 @@
           <a:lstStyle/>
           <a:p>
             <a:r>
-              <a:t>Čas: 5–12 minut.</a:t>
-            </a:r>
-          </a:p>
-          <a:p>
-            <a:r>
-              <a:t>Klíčové pojmy: Osa od nuly · Graf podle dat · Zdroj a omezení</a:t>
-            </a:r>
-          </a:p>
-          <a:p>
-            <a:r>
-              <a:t>Poctivá infografika říká i to, co z dat nevíme.</a:t>
-            </a:r>
-          </a:p>
-          <a:p>
-            <a:r>
-              <a:t>Postup: vysvětli stručně, ověř porozuměním otázkou, nepřednášej déle než 7 minut.</a:t>
+              <a:t>Čas: 5–12 minut. Promítej u toho ukázku B.</a:t>
+            </a:r>
+          </a:p>
+          <a:p/>
+          <a:p>
+            <a:r>
+              <a:t>CO ŘEKNEŠ</a:t>
+            </a:r>
+          </a:p>
+          <a:p>
+            <a:r>
+              <a:t>K bodu 01: „Sloupcový graf porovnává výšky. Když osa nezačíná na nule, výšky přestanou odpovídat číslům — z rozdílu tří procent se stane sloupec dvakrát vyšší. Tohle je nejčastější způsob, jak lhát pravdivými čísly.“</a:t>
+            </a:r>
+          </a:p>
+          <a:p>
+            <a:r>
+              <a:t>K bodu 02: „Sloupce jsou na porovnávání množství. Koláč jen na podíly z jednoho celku — a nikdy ve 3D, protože nakloněním se přední výseč opticky zvětší.“</a:t>
+            </a:r>
+          </a:p>
+          <a:p>
+            <a:r>
+              <a:t>K bodu 03: „A poslední věc, na kterou se zapomíná nejčastěji: odkud data jsou, kolika lidí se ptali a kdy. Bez toho není graf informace, ale obrázek.“</a:t>
+            </a:r>
+          </a:p>
+          <a:p>
+            <a:r>
+              <a:t>Závěr: „Poctivá infografika říká i to, co z dat nevíme.“</a:t>
+            </a:r>
+          </a:p>
+          <a:p/>
+          <a:p>
+            <a:r>
+              <a:t>CO DĚLÁŠ</a:t>
+            </a:r>
+          </a:p>
+          <a:p>
+            <a:r>
+              <a:t>Ukaž useknutou osu přímo na promítnuté ukázce B a zakryj rukou spodek grafu — rozdíl je vidět okamžitě.</a:t>
+            </a:r>
+          </a:p>
+          <a:p/>
+          <a:p>
+            <a:r>
+              <a:t>POZOR</a:t>
+            </a:r>
+          </a:p>
+          <a:p>
+            <a:r>
+              <a:t>Neříkej ostatní chyby z ukázky B. Osa stačí jako příklad, zbytek si mají najít.</a:t>
             </a:r>
           </a:p>
         </p:txBody>
@@ -756,29 +861,85 @@
               <a:t>Čas: 12–40 minut.</a:t>
             </a:r>
           </a:p>
-          <a:p>
-            <a:r>
-              <a:t>Soubory: Canva, Infografika v Canvě.txt, Výstupy k posouzení/</a:t>
-            </a:r>
-          </a:p>
-          <a:p>
-            <a:r>
-              <a:t>12–20 min – rozbor ukázek; chyby v B: useknutá osa od 25, 3D koláč, součet 104 %, zdroj internet, emoční titulky.</a:t>
-            </a:r>
-          </a:p>
-          <a:p>
-            <a:r>
-              <a:t>20–34 min – vlastní tvorba v Canvě.</a:t>
-            </a:r>
-          </a:p>
-          <a:p>
-            <a:r>
-              <a:t>34–40 min – dva až tři výstupy na projekci a zpětná vazba podle kritérií.</a:t>
-            </a:r>
-          </a:p>
-          <a:p>
-            <a:r>
-              <a:t>Výstup: Seznam pěti chyb v ukázce B, vlastní infografika ve dvou formátech a zdůvodnění.</a:t>
+          <a:p/>
+          <a:p>
+            <a:r>
+              <a:t>CO ŘEKNEŠ</a:t>
+            </a:r>
+          </a:p>
+          <a:p>
+            <a:r>
+              <a:t>„Nejdřív najdete v ukázce B aspoň pět konkrétních chyb a zapíšete je. Konkrétní znamená, že u každé napíšete, kde je a jak by se opravila. Pak teprve tvoříte vlastní.“</a:t>
+            </a:r>
+          </a:p>
+          <a:p/>
+          <a:p>
+            <a:r>
+              <a:t>12–20 MIN · ROZBOR UKÁZEK</a:t>
+            </a:r>
+          </a:p>
+          <a:p>
+            <a:r>
+              <a:t>Pět chyb, které v ukázce B jsou: osa začíná na 25 místo na nule · koláčový graf ve 3D · součet procent dává 104 % · zdroj uvedený jako „internet“ · emoční titulky, které v datech nemají oporu.</a:t>
+            </a:r>
+          </a:p>
+          <a:p>
+            <a:r>
+              <a:t>Kdo najde všech pět, dostane šestou otázku: chybí velikost vzorku a datum sběru. Uznej i další chyby, které vážně obhájí.</a:t>
+            </a:r>
+          </a:p>
+          <a:p/>
+          <a:p>
+            <a:r>
+              <a:t>20–34 MIN · VLASTNÍ TVORBA</a:t>
+            </a:r>
+          </a:p>
+          <a:p>
+            <a:r>
+              <a:t>Obě sady dat ze zadání, povinné prvky podle pracovního listu.</a:t>
+            </a:r>
+          </a:p>
+          <a:p>
+            <a:r>
+              <a:t>Nejčastější prohřešek studentů je právě ten, který před chvílí kritizovali: Canva useknutou osu nabídne sama a vypadá to líp. Obcházej a kontroluj osy.</a:t>
+            </a:r>
+          </a:p>
+          <a:p>
+            <a:r>
+              <a:t>Druhý prohřešek je pět písem a osm barev. Strop jsou dvě písma a čtyři barvy a je to v kontrole.</a:t>
+            </a:r>
+          </a:p>
+          <a:p/>
+          <a:p>
+            <a:r>
+              <a:t>34–40 MIN · ZPĚTNÁ VAZBA</a:t>
+            </a:r>
+          </a:p>
+          <a:p>
+            <a:r>
+              <a:t>Promítni dva až tři výstupy a projeď je podle kritérií. Ptej se třídy, ne autora — a začni tím, co je na výstupu dobře.</a:t>
+            </a:r>
+          </a:p>
+          <a:p/>
+          <a:p>
+            <a:r>
+              <a:t>VÝSTUP</a:t>
+            </a:r>
+          </a:p>
+          <a:p>
+            <a:r>
+              <a:t>Seznam pěti chyb v ukázce B, vlastní infografika ve dvou formátech a zdůvodnění.</a:t>
+            </a:r>
+          </a:p>
+          <a:p/>
+          <a:p>
+            <a:r>
+              <a:t>KDYŽ NENÍ ČAS</a:t>
+            </a:r>
+          </a:p>
+          <a:p>
+            <a:r>
+              <a:t>Zkrať vlastní tvorbu na jednu sadu dat. Rozbor ukázek nekrať, ten nese celou hodinu.</a:t>
             </a:r>
           </a:p>
         </p:txBody>
@@ -848,27 +1009,40 @@
           <a:lstStyle/>
           <a:p>
             <a:r>
-              <a:t>Průběžná kontrola. Projdi body nahlas, studenti si odškrtávají v sešitu.</a:t>
-            </a:r>
-          </a:p>
-          <a:p>
-            <a:r>
-              <a:t>• Obě osy v tvé infografice začínají na nule.</a:t>
-            </a:r>
-          </a:p>
-          <a:p>
-            <a:r>
-              <a:t>• Uvedl jsi zdroj, velikost vzorku i datum.</a:t>
-            </a:r>
-          </a:p>
-          <a:p>
-            <a:r>
-              <a:t>• Máš poznámku o omezení dat.</a:t>
-            </a:r>
-          </a:p>
-          <a:p>
-            <a:r>
-              <a:t>• Použil jsi nejvýše dvě písma a čtyři barvy.</a:t>
+              <a:t>Průběžná kontrola, zhruba 38. minuta.</a:t>
+            </a:r>
+          </a:p>
+          <a:p/>
+          <a:p>
+            <a:r>
+              <a:t>CO ŘEKNEŠ</a:t>
+            </a:r>
+          </a:p>
+          <a:p>
+            <a:r>
+              <a:t>„Než odevzdáte, projedeme čtyři věci. Odškrtávejte si je.“ Čti body nahlas a mezi nimi nech pauzu.</a:t>
+            </a:r>
+          </a:p>
+          <a:p/>
+          <a:p>
+            <a:r>
+              <a:t>CO DĚLÁŠ</a:t>
+            </a:r>
+          </a:p>
+          <a:p>
+            <a:r>
+              <a:t>Bod o omezení dat je ten, který skoro nikdo nemá. Řekni k němu příklad: „Ptali jsme se jen naší školy, takže to neplatí o všech středoškolácích.“ Jedna taková věta stačí.</a:t>
+            </a:r>
+          </a:p>
+          <a:p/>
+          <a:p>
+            <a:r>
+              <a:t>POZOR</a:t>
+            </a:r>
+          </a:p>
+          <a:p>
+            <a:r>
+              <a:t>Není to známkování, je to poslední šance práci dodělat.</a:t>
             </a:r>
           </a:p>
         </p:txBody>
@@ -938,32 +1112,65 @@
           <a:lstStyle/>
           <a:p>
             <a:r>
-              <a:t>Společný rozbor – očekávané závěry:</a:t>
-            </a:r>
-          </a:p>
-          <a:p>
-            <a:r>
-              <a:t>Useknutá osa: Nejčastější způsob, jak z malého rozdílu udělat dramatický.</a:t>
-            </a:r>
-          </a:p>
-          <a:p>
-            <a:r>
-              <a:t>3D efekt: Zkresluje plochy výsečí. U koláčového grafu se nepoužívá.</a:t>
-            </a:r>
-          </a:p>
-          <a:p>
-            <a:r>
-              <a:t>Součet procent: Pokud nedává 100 %, musí být vysvětleno proč.</a:t>
-            </a:r>
-          </a:p>
-          <a:p>
-            <a:r>
-              <a:t>Poctivost: Uvedení zdroje a omezení není slabina, ale známka kvality.</a:t>
-            </a:r>
-          </a:p>
-          <a:p>
-            <a:r>
-              <a:t>Hodnoť postup a zdůvodnění, ne shodu s jednou formulací.</a:t>
+              <a:t>Společný rozbor, 40–43 minut.</a:t>
+            </a:r>
+          </a:p>
+          <a:p/>
+          <a:p>
+            <a:r>
+              <a:t>CO ŘEKNEŠ</a:t>
+            </a:r>
+          </a:p>
+          <a:p>
+            <a:r>
+              <a:t>Otevři otázku, která hodinu přesahuje: „Myslíte, že ten, kdo dělal ukázku B, lhal?“</a:t>
+            </a:r>
+          </a:p>
+          <a:p>
+            <a:r>
+              <a:t>Nech to chvíli běžet. Dobrý závěr je, že všechna čísla v B jsou pravdivá a graf přesto klame — a že se to dá udělat i bez úmyslu, protože nástroj to sám nabídne.</a:t>
+            </a:r>
+          </a:p>
+          <a:p>
+            <a:r>
+              <a:t>Pak nech studenty vyslovit čtyři závěry ze snímku a doplň jen to, co nezazní.</a:t>
+            </a:r>
+          </a:p>
+          <a:p/>
+          <a:p>
+            <a:r>
+              <a:t>OČEKÁVANÉ ZÁVĚRY</a:t>
+            </a:r>
+          </a:p>
+          <a:p>
+            <a:r>
+              <a:t>Useknutá osa: nejčastější způsob, jak z malého rozdílu udělat dramatický.</a:t>
+            </a:r>
+          </a:p>
+          <a:p>
+            <a:r>
+              <a:t>3D efekt: zkresluje plochy výsečí, u koláčového grafu se nepoužívá.</a:t>
+            </a:r>
+          </a:p>
+          <a:p>
+            <a:r>
+              <a:t>Součet procent: pokud nedává 100 %, musí být vysvětleno proč.</a:t>
+            </a:r>
+          </a:p>
+          <a:p>
+            <a:r>
+              <a:t>Poctivost: uvedení zdroje a omezení není slabina, ale známka kvality.</a:t>
+            </a:r>
+          </a:p>
+          <a:p/>
+          <a:p>
+            <a:r>
+              <a:t>POZOR</a:t>
+            </a:r>
+          </a:p>
+          <a:p>
+            <a:r>
+              <a:t>Hodnoť postup a zdůvodnění, ne grafickou zdatnost. Střízlivá infografika s poctivými osami je lepší výsledek než efektní s useknutou.</a:t>
             </a:r>
           </a:p>
         </p:txBody>
@@ -1033,17 +1240,45 @@
           <a:lstStyle/>
           <a:p>
             <a:r>
-              <a:t>Exit ticket: Uveď jednu konkrétní chybu z ukázky B a napiš, jak bys ji opravil.</a:t>
-            </a:r>
-          </a:p>
-          <a:p>
-            <a:r>
-              <a:t>Sbírej individuálně. Slouží jako doklad o učení každého studenta.</a:t>
-            </a:r>
-          </a:p>
-          <a:p>
-            <a:r>
-              <a:t>Očekávaná odpověď: Očekává se konkrétní chyba (např. osa od 25) a konkrétní oprava (osa od nuly).</a:t>
+              <a:t>Exit ticket, poslední dvě minuty.</a:t>
+            </a:r>
+          </a:p>
+          <a:p/>
+          <a:p>
+            <a:r>
+              <a:t>CO ŘEKNEŠ</a:t>
+            </a:r>
+          </a:p>
+          <a:p>
+            <a:r>
+              <a:t>„Každý sám. Jedna konkrétní chyba z ukázky B a jak bys ji opravil.“</a:t>
+            </a:r>
+          </a:p>
+          <a:p/>
+          <a:p>
+            <a:r>
+              <a:t>CO DĚLÁŠ</a:t>
+            </a:r>
+          </a:p>
+          <a:p>
+            <a:r>
+              <a:t>Sbírej u dveří. Bez opravy se lístek nepočítá — najít chybu umí každý, opravit ji je ta dovednost.</a:t>
+            </a:r>
+          </a:p>
+          <a:p/>
+          <a:p>
+            <a:r>
+              <a:t>OČEKÁVANÁ ODPOVĚĎ</a:t>
+            </a:r>
+          </a:p>
+          <a:p>
+            <a:r>
+              <a:t>Konkrétní chyba (osa od 25) a konkrétní oprava (osa od nuly). Stejně dobré je 3D koláč → plochý koláč nebo dva sloupce, nebo zdroj „internet“ → název průzkumu, počet dotázaných a datum.</a:t>
+            </a:r>
+          </a:p>
+          <a:p>
+            <a:r>
+              <a:t>Odpověď „bylo to zavádějící, udělal bych to líp“ vrať. To není oprava.</a:t>
             </a:r>
           </a:p>
         </p:txBody>

--- a/public/materialy/1L/6/Prezentace k hodinám/7. Infografika a prezentace.pptx
+++ b/public/materialy/1L/6/Prezentace k hodinám/7. Infografika a prezentace.pptx
@@ -513,12 +513,12 @@
           </a:p>
           <a:p>
             <a:r>
-              <a:t>Ověř školní přístup do Canvy a pravidla organizace pro účty nezletilých. Tohle je jediná hodina bloku, která potřebuje přihlášení k externí službě — vyřeš to dřív než v hodině.</a:t>
-            </a:r>
-          </a:p>
-          <a:p>
-            <a:r>
-              <a:t>Rozbal Výstupy k posouzení.zip a rozdej Infografika v Canvě.txt. Studenti potřebují mít infografiku A i B otevřenou vedle sebe.</a:t>
+              <a:t>Ověř školní přístup do Canvy a pravidla organizace pro účty nezletilých. Tohle je jediná hodina bloku, která potřebuje přihlášení k externí službě — vyřeš to dřív než v hodině.</a:t>
+            </a:r>
+          </a:p>
+          <a:p>
+            <a:r>
+              <a:t>Rozbal Výstupy k posouzení.zip a rozdej Infografika v Canvě.txt. Studenti potřebují mít infografiku A i B otevřenou vedle sebe.</a:t>
             </a:r>
           </a:p>
           <a:p/>
@@ -529,7 +529,7 @@
           </a:p>
           <a:p>
             <a:r>
-              <a:t>Metodika s tím počítá: infografika se navrhne na papír A4 podle stejných kritérií. Hodnotí se rozvržení a poctivost zobrazení, ne ovládání nástroje. Rozbor ukázek A a B proběhne beze změny — je to jen prohlížení obrázků.</a:t>
+              <a:t>Metodika s tím počítá: infografika se navrhne na papír A4 podle stejných kritérií. Hodnotí se rozvržení a poctivost zobrazení, ne ovládání nástroje. Rozbor ukázek A a B proběhne beze změny — je to jen prohlížení obrázků.</a:t>
             </a:r>
           </a:p>
           <a:p/>
@@ -540,7 +540,7 @@
           </a:p>
           <a:p>
             <a:r>
-              <a:t>Student vytvoří infografiku, která data zobrazuje poctivě, a rozpozná zavádějící zobrazení.</a:t>
+              <a:t>Student vytvoří infografiku, která data zobrazuje poctivě, a rozpozná zavádějící zobrazení.</a:t>
             </a:r>
           </a:p>
           <a:p/>
@@ -551,7 +551,7 @@
           </a:p>
           <a:p>
             <a:r>
-              <a:t>Seznam pěti chyb v ukázce B, vlastní infografika ve dvou formátech a zdůvodnění.</a:t>
+              <a:t>Seznam pěti chyb v ukázce B, vlastní infografika ve dvou formátech a zdůvodnění.</a:t>
             </a:r>
           </a:p>
           <a:p/>
@@ -562,7 +562,7 @@
           </a:p>
           <a:p>
             <a:r>
-              <a:t>5 min porovnání · 7 min výklad · 28 min práce · 5 min rozbor a exit ticket.</a:t>
+              <a:t>5 min porovnání · 7 min výklad · 28 min práce · 5 min rozbor a exit ticket.</a:t>
             </a:r>
           </a:p>
         </p:txBody>
@@ -643,7 +643,7 @@
           </a:p>
           <a:p>
             <a:r>
-              <a:t>„Otevřete si obě infografiky ze složky Výstupy k posouzení vedle sebe. Ukazují stejná čísla. Působí opačně. Nejdřív najděte čísla, která jsou v obou stejná — a pak pojmenujte, čím to je.“</a:t>
+              <a:t>„Otevřete si obě infografiky ze složky Výstupy k posouzení vedle sebe. Ukazují stejná čísla. Působí opačně. Nejdřív najděte čísla, která jsou v obou stejná — a pak pojmenujte, čím to je.“</a:t>
             </a:r>
           </a:p>
           <a:p/>
@@ -654,7 +654,7 @@
           </a:p>
           <a:p>
             <a:r>
-              <a:t>Nech je pracovat mlčky a nekomentuj. Většina třídy nejdřív řekne „B je barevnější“. To je pozorování, ne odpověď — pošli je zpátky k číslům.</a:t>
+              <a:t>Nech je pracovat mlčky a nekomentuj. Většina třídy nejdřív řekne „B je barevnější“. To je pozorování, ne odpověď — pošli je zpátky k číslům.</a:t>
             </a:r>
           </a:p>
           <a:p>
@@ -740,7 +740,7 @@
           <a:lstStyle/>
           <a:p>
             <a:r>
-              <a:t>Čas: 5–12 minut. Promítej u toho ukázku B.</a:t>
+              <a:t>Čas: 5–12 minut. Promítej u toho ukázku B.</a:t>
             </a:r>
           </a:p>
           <a:p/>
@@ -751,22 +751,22 @@
           </a:p>
           <a:p>
             <a:r>
-              <a:t>K bodu 01: „Sloupcový graf porovnává výšky. Když osa nezačíná na nule, výšky přestanou odpovídat číslům — z rozdílu tří procent se stane sloupec dvakrát vyšší. Tohle je nejčastější způsob, jak lhát pravdivými čísly.“</a:t>
-            </a:r>
-          </a:p>
-          <a:p>
-            <a:r>
-              <a:t>K bodu 02: „Sloupce jsou na porovnávání množství. Koláč jen na podíly z jednoho celku — a nikdy ve 3D, protože nakloněním se přední výseč opticky zvětší.“</a:t>
-            </a:r>
-          </a:p>
-          <a:p>
-            <a:r>
-              <a:t>K bodu 03: „A poslední věc, na kterou se zapomíná nejčastěji: odkud data jsou, kolika lidí se ptali a kdy. Bez toho není graf informace, ale obrázek.“</a:t>
-            </a:r>
-          </a:p>
-          <a:p>
-            <a:r>
-              <a:t>Závěr: „Poctivá infografika říká i to, co z dat nevíme.“</a:t>
+              <a:t>K bodu 01: „Sloupcový graf porovnává výšky. Když osa nezačíná na nule, výšky přestanou odpovídat číslům — z rozdílu tří procent se stane sloupec dvakrát vyšší. Tohle je nejčastější způsob, jak lhát pravdivými čísly.“</a:t>
+            </a:r>
+          </a:p>
+          <a:p>
+            <a:r>
+              <a:t>K bodu 02: „Sloupce jsou na porovnávání množství. Koláč jen na podíly z jednoho celku — a nikdy ve 3D, protože nakloněním se přední výseč opticky zvětší.“</a:t>
+            </a:r>
+          </a:p>
+          <a:p>
+            <a:r>
+              <a:t>K bodu 03: „A poslední věc, na kterou se zapomíná nejčastěji: odkud data jsou, kolika lidí se ptali a kdy. Bez toho není graf informace, ale obrázek.“</a:t>
+            </a:r>
+          </a:p>
+          <a:p>
+            <a:r>
+              <a:t>Závěr: „Poctivá infografika říká i to, co z dat nevíme.“</a:t>
             </a:r>
           </a:p>
           <a:p/>
@@ -777,7 +777,7 @@
           </a:p>
           <a:p>
             <a:r>
-              <a:t>Ukaž useknutou osu přímo na promítnuté ukázce B a zakryj rukou spodek grafu — rozdíl je vidět okamžitě.</a:t>
+              <a:t>Ukaž useknutou osu přímo na promítnuté ukázce B a zakryj rukou spodek grafu — rozdíl je vidět okamžitě.</a:t>
             </a:r>
           </a:p>
           <a:p/>
@@ -788,7 +788,7 @@
           </a:p>
           <a:p>
             <a:r>
-              <a:t>Neříkej ostatní chyby z ukázky B. Osa stačí jako příklad, zbytek si mají najít.</a:t>
+              <a:t>Neříkej ostatní chyby z ukázky B. Osa stačí jako příklad, zbytek si mají najít.</a:t>
             </a:r>
           </a:p>
         </p:txBody>
@@ -869,7 +869,7 @@
           </a:p>
           <a:p>
             <a:r>
-              <a:t>„Nejdřív najdete v ukázce B aspoň pět konkrétních chyb a zapíšete je. Konkrétní znamená, že u každé napíšete, kde je a jak by se opravila. Pak teprve tvoříte vlastní.“</a:t>
+              <a:t>„Nejdřív najdete v ukázce B aspoň pět konkrétních chyb a zapíšete je. Konkrétní znamená, že u každé napíšete, kde je a jak by se opravila. Pak teprve tvoříte vlastní.“</a:t>
             </a:r>
           </a:p>
           <a:p/>
@@ -880,12 +880,12 @@
           </a:p>
           <a:p>
             <a:r>
-              <a:t>Pět chyb, které v ukázce B jsou: osa začíná na 25 místo na nule · koláčový graf ve 3D · součet procent dává 104 % · zdroj uvedený jako „internet“ · emoční titulky, které v datech nemají oporu.</a:t>
-            </a:r>
-          </a:p>
-          <a:p>
-            <a:r>
-              <a:t>Kdo najde všech pět, dostane šestou otázku: chybí velikost vzorku a datum sběru. Uznej i další chyby, které vážně obhájí.</a:t>
+              <a:t>Pět chyb, které v ukázce B jsou: osa začíná na 25 místo na nule · koláčový graf ve 3D · součet procent dává 104 % · zdroj uvedený jako „internet“ · emoční titulky, které v datech nemají oporu.</a:t>
+            </a:r>
+          </a:p>
+          <a:p>
+            <a:r>
+              <a:t>Kdo najde všech pět, dostane šestou otázku: chybí velikost vzorku a datum sběru. Uznej i další chyby, které vážně obhájí.</a:t>
             </a:r>
           </a:p>
           <a:p/>
@@ -901,12 +901,12 @@
           </a:p>
           <a:p>
             <a:r>
-              <a:t>Nejčastější prohřešek studentů je právě ten, který před chvílí kritizovali: Canva useknutou osu nabídne sama a vypadá to líp. Obcházej a kontroluj osy.</a:t>
-            </a:r>
-          </a:p>
-          <a:p>
-            <a:r>
-              <a:t>Druhý prohřešek je pět písem a osm barev. Strop jsou dvě písma a čtyři barvy a je to v kontrole.</a:t>
+              <a:t>Nejčastější prohřešek studentů je právě ten, který před chvílí kritizovali: Canva useknutou osu nabídne sama a vypadá to líp. Obcházej a kontroluj osy.</a:t>
+            </a:r>
+          </a:p>
+          <a:p>
+            <a:r>
+              <a:t>Druhý prohřešek je pět písem a osm barev. Strop jsou dvě písma a čtyři barvy a je to v kontrole.</a:t>
             </a:r>
           </a:p>
           <a:p/>
@@ -917,7 +917,7 @@
           </a:p>
           <a:p>
             <a:r>
-              <a:t>Promítni dva až tři výstupy a projeď je podle kritérií. Ptej se třídy, ne autora — a začni tím, co je na výstupu dobře.</a:t>
+              <a:t>Promítni dva až tři výstupy a projeď je podle kritérií. Ptej se třídy, ne autora — a začni tím, co je na výstupu dobře.</a:t>
             </a:r>
           </a:p>
           <a:p/>
@@ -928,7 +928,7 @@
           </a:p>
           <a:p>
             <a:r>
-              <a:t>Seznam pěti chyb v ukázce B, vlastní infografika ve dvou formátech a zdůvodnění.</a:t>
+              <a:t>Seznam pěti chyb v ukázce B, vlastní infografika ve dvou formátech a zdůvodnění.</a:t>
             </a:r>
           </a:p>
           <a:p/>
@@ -1020,7 +1020,7 @@
           </a:p>
           <a:p>
             <a:r>
-              <a:t>„Než odevzdáte, projedeme čtyři věci. Odškrtávejte si je.“ Čti body nahlas a mezi nimi nech pauzu.</a:t>
+              <a:t>„Než odevzdáte, projedeme čtyři věci. Odškrtávejte si je.“ Čti body nahlas a mezi nimi nech pauzu.</a:t>
             </a:r>
           </a:p>
           <a:p/>
@@ -1031,7 +1031,7 @@
           </a:p>
           <a:p>
             <a:r>
-              <a:t>Bod o omezení dat je ten, který skoro nikdo nemá. Řekni k němu příklad: „Ptali jsme se jen naší školy, takže to neplatí o všech středoškolácích.“ Jedna taková věta stačí.</a:t>
+              <a:t>Bod o omezení dat je ten, který skoro nikdo nemá. Řekni k němu příklad: „Ptali jsme se jen naší školy, takže to neplatí o všech středoškolácích.“ Jedna taková věta stačí.</a:t>
             </a:r>
           </a:p>
           <a:p/>
@@ -1128,12 +1128,12 @@
           </a:p>
           <a:p>
             <a:r>
-              <a:t>Nech to chvíli běžet. Dobrý závěr je, že všechna čísla v B jsou pravdivá a graf přesto klame — a že se to dá udělat i bez úmyslu, protože nástroj to sám nabídne.</a:t>
-            </a:r>
-          </a:p>
-          <a:p>
-            <a:r>
-              <a:t>Pak nech studenty vyslovit čtyři závěry ze snímku a doplň jen to, co nezazní.</a:t>
+              <a:t>Nech to chvíli běžet. Dobrý závěr je, že všechna čísla v B jsou pravdivá a graf přesto klame — a že se to dá udělat i bez úmyslu, protože nástroj to sám nabídne.</a:t>
+            </a:r>
+          </a:p>
+          <a:p>
+            <a:r>
+              <a:t>Pak nech studenty vyslovit čtyři závěry ze snímku a doplň jen to, co nezazní.</a:t>
             </a:r>
           </a:p>
           <a:p/>
@@ -1144,12 +1144,12 @@
           </a:p>
           <a:p>
             <a:r>
-              <a:t>Useknutá osa: nejčastější způsob, jak z malého rozdílu udělat dramatický.</a:t>
-            </a:r>
-          </a:p>
-          <a:p>
-            <a:r>
-              <a:t>3D efekt: zkresluje plochy výsečí, u koláčového grafu se nepoužívá.</a:t>
+              <a:t>Useknutá osa: nejčastější způsob, jak z malého rozdílu udělat dramatický.</a:t>
+            </a:r>
+          </a:p>
+          <a:p>
+            <a:r>
+              <a:t>3D efekt: zkresluje plochy výsečí, u koláčového grafu se nepoužívá.</a:t>
             </a:r>
           </a:p>
           <a:p>
@@ -1159,7 +1159,7 @@
           </a:p>
           <a:p>
             <a:r>
-              <a:t>Poctivost: uvedení zdroje a omezení není slabina, ale známka kvality.</a:t>
+              <a:t>Poctivost: uvedení zdroje a omezení není slabina, ale známka kvality.</a:t>
             </a:r>
           </a:p>
           <a:p/>
@@ -1170,7 +1170,7 @@
           </a:p>
           <a:p>
             <a:r>
-              <a:t>Hodnoť postup a zdůvodnění, ne grafickou zdatnost. Střízlivá infografika s poctivými osami je lepší výsledek než efektní s useknutou.</a:t>
+              <a:t>Hodnoť postup a zdůvodnění, ne grafickou zdatnost. Střízlivá infografika s poctivými osami je lepší výsledek než efektní s useknutou.</a:t>
             </a:r>
           </a:p>
         </p:txBody>
@@ -1251,7 +1251,7 @@
           </a:p>
           <a:p>
             <a:r>
-              <a:t>„Každý sám. Jedna konkrétní chyba z ukázky B a jak bys ji opravil.“</a:t>
+              <a:t>„Každý sám. Jedna konkrétní chyba z ukázky B a jak bys ji opravil.“</a:t>
             </a:r>
           </a:p>
           <a:p/>
@@ -1262,7 +1262,7 @@
           </a:p>
           <a:p>
             <a:r>
-              <a:t>Sbírej u dveří. Bez opravy se lístek nepočítá — najít chybu umí každý, opravit ji je ta dovednost.</a:t>
+              <a:t>Sbírej u dveří. Bez opravy se lístek nepočítá — najít chybu umí každý, opravit ji je ta dovednost.</a:t>
             </a:r>
           </a:p>
           <a:p/>
@@ -1273,7 +1273,7 @@
           </a:p>
           <a:p>
             <a:r>
-              <a:t>Konkrétní chyba (osa od 25) a konkrétní oprava (osa od nuly). Stejně dobré je 3D koláč → plochý koláč nebo dva sloupce, nebo zdroj „internet“ → název průzkumu, počet dotázaných a datum.</a:t>
+              <a:t>Konkrétní chyba (osa od 25) a konkrétní oprava (osa od nuly). Stejně dobré je 3D koláč → plochý koláč nebo dva sloupce, nebo zdroj „internet“ → název průzkumu, počet dotázaných a datum.</a:t>
             </a:r>
           </a:p>
           <a:p>
@@ -4476,7 +4476,7 @@
                 </a:solidFill>
                 <a:latin typeface="Calibri"/>
               </a:rPr>
-              <a:t>Infografika a prezentace</a:t>
+              <a:t>Infografika a prezentace</a:t>
             </a:r>
           </a:p>
         </p:txBody>
@@ -4515,7 +4515,7 @@
                 </a:solidFill>
                 <a:latin typeface="Calibri"/>
               </a:rPr>
-              <a:t>Student vytvoří infografiku, která data zobrazuje poctivě, a rozpozná zavádějící zobrazení.</a:t>
+              <a:t>Student vytvoří infografiku, která data zobrazuje poctivě, a rozpozná zavádějící zobrazení.</a:t>
             </a:r>
           </a:p>
         </p:txBody>
@@ -4840,7 +4840,7 @@
                 </a:solidFill>
                 <a:latin typeface="Calibri"/>
               </a:rPr>
-              <a:t>POČÍTAČOVÁ GRAFIKA A PRÁCE S MULTIMÉDII</a:t>
+              <a:t>POČÍTAČOVÁ GRAFIKA A PRÁCE S MULTIMÉDII</a:t>
             </a:r>
           </a:p>
         </p:txBody>
@@ -4949,7 +4949,7 @@
                 </a:solidFill>
                 <a:latin typeface="Calibri"/>
               </a:rPr>
-              <a:t>POROVNEJ A A B</a:t>
+              <a:t>POROVNEJ A A B</a:t>
             </a:r>
           </a:p>
         </p:txBody>
@@ -4988,7 +4988,7 @@
                 </a:solidFill>
                 <a:latin typeface="Calibri"/>
               </a:rPr>
-              <a:t>Otevři obě infografiky ze složky Výstupy k posouzení.</a:t>
+              <a:t>Otevři obě infografiky ze složky Výstupy k posouzení.</a:t>
             </a:r>
           </a:p>
         </p:txBody>
@@ -5062,7 +5062,7 @@
                 </a:solidFill>
                 <a:latin typeface="Calibri"/>
               </a:rPr>
-              <a:t>Která čísla jsou v obou stejná?</a:t>
+              <a:t>Která čísla jsou v obou stejná?</a:t>
             </a:r>
           </a:p>
         </p:txBody>
@@ -5136,7 +5136,7 @@
                 </a:solidFill>
                 <a:latin typeface="Calibri"/>
               </a:rPr>
-              <a:t>Co v B mění dojem?</a:t>
+              <a:t>Co v B mění dojem?</a:t>
             </a:r>
           </a:p>
         </p:txBody>
@@ -5382,7 +5382,7 @@
                 </a:solidFill>
                 <a:latin typeface="Calibri"/>
               </a:rPr>
-              <a:t>POČÍTAČOVÁ GRAFIKA A PRÁCE S MULTIMÉDII</a:t>
+              <a:t>POČÍTAČOVÁ GRAFIKA A PRÁCE S MULTIMÉDII</a:t>
             </a:r>
           </a:p>
         </p:txBody>
@@ -5570,7 +5570,7 @@
                 </a:solidFill>
                 <a:latin typeface="Calibri"/>
               </a:rPr>
-              <a:t>Useknutá osa zveličí malý rozdíl. U sloupcového grafu patří nula do grafu.</a:t>
+              <a:t>Useknutá osa zveličí malý rozdíl. U sloupcového grafu patří nula do grafu.</a:t>
             </a:r>
           </a:p>
         </p:txBody>
@@ -5723,7 +5723,7 @@
                 </a:solidFill>
                 <a:latin typeface="Calibri"/>
               </a:rPr>
-              <a:t>Sloupce na porovnání množství, koláč jen na podíly z celku a bez 3D.</a:t>
+              <a:t>Sloupce na porovnání množství, koláč jen na podíly z celku a bez 3D.</a:t>
             </a:r>
           </a:p>
         </p:txBody>
@@ -5837,7 +5837,7 @@
                 </a:solidFill>
                 <a:latin typeface="Calibri"/>
               </a:rPr>
-              <a:t>Zdroj a omezení</a:t>
+              <a:t>Zdroj a omezení</a:t>
             </a:r>
           </a:p>
         </p:txBody>
@@ -5876,7 +5876,7 @@
                 </a:solidFill>
                 <a:latin typeface="Calibri"/>
               </a:rPr>
-              <a:t>Velikost vzorku, datum a původ dat patří k výsledku, ne do poznámky pod čarou.</a:t>
+              <a:t>Velikost vzorku, datum a původ dat patří k výsledku, ne do poznámky pod čarou.</a:t>
             </a:r>
           </a:p>
         </p:txBody>
@@ -5955,7 +5955,7 @@
                 </a:solidFill>
                 <a:latin typeface="Calibri"/>
               </a:rPr>
-              <a:t>Poctivá infografika říká i to, co z dat nevíme.</a:t>
+              <a:t>Poctivá infografika říká i to, co z dat nevíme.</a:t>
             </a:r>
           </a:p>
         </p:txBody>
@@ -6166,7 +6166,7 @@
                 </a:solidFill>
                 <a:latin typeface="Calibri"/>
               </a:rPr>
-              <a:t>POČÍTAČOVÁ GRAFIKA A PRÁCE S MULTIMÉDII</a:t>
+              <a:t>POČÍTAČOVÁ GRAFIKA A PRÁCE S MULTIMÉDII</a:t>
             </a:r>
           </a:p>
         </p:txBody>
@@ -6271,7 +6271,7 @@
                 </a:solidFill>
                 <a:latin typeface="Calibri"/>
               </a:rPr>
-              <a:t>Canva, Infografika v Canvě.txt, Výstupy k posouzení/</a:t>
+              <a:t>Canva, Infografika v Canvě.txt, Výstupy k posouzení/</a:t>
             </a:r>
           </a:p>
         </p:txBody>
@@ -6380,7 +6380,7 @@
                 </a:solidFill>
                 <a:latin typeface="Calibri"/>
               </a:rPr>
-              <a:t>Najdi v infografice B alespoň pět konkrétních chyb a zapiš je.</a:t>
+              <a:t>Najdi v infografice B alespoň pět konkrétních chyb a zapiš je.</a:t>
             </a:r>
           </a:p>
         </p:txBody>
@@ -6598,7 +6598,7 @@
                 </a:solidFill>
                 <a:latin typeface="Calibri"/>
               </a:rPr>
-              <a:t>Ulož infografika.pdf a infografika.png a zdůvodni volbu formátů.</a:t>
+              <a:t>Ulož infografika.pdf a infografika.png a zdůvodni volbu formátů.</a:t>
             </a:r>
           </a:p>
         </p:txBody>
@@ -6712,7 +6712,7 @@
                 </a:solidFill>
                 <a:latin typeface="Calibri"/>
               </a:rPr>
-              <a:t>Seznam pěti chyb v ukázce B, vlastní infografika ve dvou formátech a zdůvodnění.</a:t>
+              <a:t>Seznam pěti chyb v ukázce B, vlastní infografika ve dvou formátech a zdůvodnění.</a:t>
             </a:r>
           </a:p>
         </p:txBody>
@@ -6923,7 +6923,7 @@
                 </a:solidFill>
                 <a:latin typeface="Calibri"/>
               </a:rPr>
-              <a:t>POČÍTAČOVÁ GRAFIKA A PRÁCE S MULTIMÉDII</a:t>
+              <a:t>POČÍTAČOVÁ GRAFIKA A PRÁCE S MULTIMÉDII</a:t>
             </a:r>
           </a:p>
         </p:txBody>
@@ -7032,7 +7032,7 @@
                 </a:solidFill>
                 <a:latin typeface="Calibri"/>
               </a:rPr>
-              <a:t>Obě osy v tvé infografice začínají na nule.</a:t>
+              <a:t>Obě osy v tvé infografice začínají na nule.</a:t>
             </a:r>
           </a:p>
         </p:txBody>
@@ -7106,7 +7106,7 @@
                 </a:solidFill>
                 <a:latin typeface="Calibri"/>
               </a:rPr>
-              <a:t>Uvedl jsi zdroj, velikost vzorku i datum.</a:t>
+              <a:t>Uvedl jsi zdroj, velikost vzorku i datum.</a:t>
             </a:r>
           </a:p>
         </p:txBody>
@@ -7180,7 +7180,7 @@
                 </a:solidFill>
                 <a:latin typeface="Calibri"/>
               </a:rPr>
-              <a:t>Máš poznámku o omezení dat.</a:t>
+              <a:t>Máš poznámku o omezení dat.</a:t>
             </a:r>
           </a:p>
         </p:txBody>
@@ -7254,7 +7254,7 @@
                 </a:solidFill>
                 <a:latin typeface="Calibri"/>
               </a:rPr>
-              <a:t>Použil jsi nejvýše dvě písma a čtyři barvy.</a:t>
+              <a:t>Použil jsi nejvýše dvě písma a čtyři barvy.</a:t>
             </a:r>
           </a:p>
         </p:txBody>
@@ -7386,7 +7386,7 @@
                 </a:solidFill>
                 <a:latin typeface="Calibri"/>
               </a:rPr>
-              <a:t>Co si z hodiny odnést</a:t>
+              <a:t>Co si z hodiny odnést</a:t>
             </a:r>
           </a:p>
         </p:txBody>
@@ -7465,7 +7465,7 @@
                 </a:solidFill>
                 <a:latin typeface="Calibri"/>
               </a:rPr>
-              <a:t>POČÍTAČOVÁ GRAFIKA A PRÁCE S MULTIMÉDII</a:t>
+              <a:t>POČÍTAČOVÁ GRAFIKA A PRÁCE S MULTIMÉDII</a:t>
             </a:r>
           </a:p>
         </p:txBody>
@@ -7574,7 +7574,7 @@
                 </a:solidFill>
                 <a:latin typeface="Calibri"/>
               </a:rPr>
-              <a:t>Nejčastější způsob, jak z malého rozdílu udělat dramatický.</a:t>
+              <a:t>Nejčastější způsob, jak z malého rozdílu udělat dramatický.</a:t>
             </a:r>
           </a:p>
         </p:txBody>
@@ -7692,7 +7692,7 @@
                 </a:solidFill>
                 <a:latin typeface="Calibri"/>
               </a:rPr>
-              <a:t>Zkresluje plochy výsečí. U koláčového grafu se nepoužívá.</a:t>
+              <a:t>Zkresluje plochy výsečí. U koláčového grafu se nepoužívá.</a:t>
             </a:r>
           </a:p>
         </p:txBody>
@@ -7928,7 +7928,7 @@
                 </a:solidFill>
                 <a:latin typeface="Calibri"/>
               </a:rPr>
-              <a:t>Uvedení zdroje a omezení není slabina, ale známka kvality.</a:t>
+              <a:t>Uvedení zdroje a omezení není slabina, ale známka kvality.</a:t>
             </a:r>
           </a:p>
         </p:txBody>
@@ -8069,7 +8069,7 @@
                 </a:solidFill>
                 <a:latin typeface="Calibri"/>
               </a:rPr>
-              <a:t>POČÍTAČOVÁ GRAFIKA A PRÁCE S MULTIMÉDII</a:t>
+              <a:t>POČÍTAČOVÁ GRAFIKA A PRÁCE S MULTIMÉDII</a:t>
             </a:r>
           </a:p>
         </p:txBody>
@@ -8178,7 +8178,7 @@
                 </a:solidFill>
                 <a:latin typeface="Calibri"/>
               </a:rPr>
-              <a:t>Uveď jednu konkrétní chybu z ukázky B a napiš, jak bys ji opravil.</a:t>
+              <a:t>Uveď jednu konkrétní chybu z ukázky B a napiš, jak bys ji opravil.</a:t>
             </a:r>
           </a:p>
         </p:txBody>
@@ -8292,7 +8292,7 @@
                 </a:solidFill>
                 <a:latin typeface="Calibri"/>
               </a:rPr>
-              <a:t>Očekává se konkrétní chyba (např. osa od 25) a konkrétní oprava (osa od nuly).</a:t>
+              <a:t>Očekává se konkrétní chyba (např. osa od 25) a konkrétní oprava (osa od nuly).</a:t>
             </a:r>
           </a:p>
         </p:txBody>
